--- a/06-final-report/figures/fig-1-system-architecture.pptx
+++ b/06-final-report/figures/fig-1-system-architecture.pptx
@@ -901,7 +901,7 @@
                 <a:ea typeface="맑은 고딕" pitchFamily="34" charset="-122"/>
                 <a:cs typeface="맑은 고딕" pitchFamily="34" charset="-120"/>
               </a:rPr>
-              <a:t>그림 2. 시스템 아키텍처 (System Architecture)</a:t>
+              <a:t>그림 1. 시스템 아키텍처 (System Architecture)</a:t>
             </a:r>
             <a:endParaRPr lang="en-US" sz="1400" dirty="0"/>
           </a:p>
